--- a/livrables/Presentation_G-Lab.pptx
+++ b/livrables/Presentation_G-Lab.pptx
@@ -3343,7 +3343,7 @@
                 </a:solidFill>
                 <a:latin typeface="Calibri"/>
               </a:rPr>
-              <a:t>Réalisé par  Abdallah ATGUIRI</a:t>
+              <a:t>Réalisé par  Oussama Ennadafy</a:t>
             </a:r>
           </a:p>
           <a:p>
@@ -3753,7 +3753,7 @@
                 </a:solidFill>
                 <a:latin typeface="Calibri"/>
               </a:rPr>
-              <a:t>Abdallah ATGUIRI  ·  G-Lab  ·  Juillet 2026</a:t>
+              <a:t>Oussama Ennadafy  ·  G-Lab  ·  Juillet 2026</a:t>
             </a:r>
           </a:p>
         </p:txBody>
@@ -4642,7 +4642,7 @@
                 </a:solidFill>
                 <a:latin typeface="Calibri"/>
               </a:rPr>
-              <a:t>Abdallah ATGUIRI  ·  G-Lab  ·  Juillet 2026</a:t>
+              <a:t>Oussama Ennadafy  ·  G-Lab  ·  Juillet 2026</a:t>
             </a:r>
           </a:p>
         </p:txBody>
@@ -5959,7 +5959,7 @@
                 </a:solidFill>
                 <a:latin typeface="Calibri"/>
               </a:rPr>
-              <a:t>Abdallah ATGUIRI  ·  G-Lab  ·  Juillet 2026</a:t>
+              <a:t>Oussama Ennadafy  ·  G-Lab  ·  Juillet 2026</a:t>
             </a:r>
           </a:p>
         </p:txBody>
@@ -6449,7 +6449,7 @@
                 </a:solidFill>
                 <a:latin typeface="Calibri"/>
               </a:rPr>
-              <a:t>Abdallah ATGUIRI</a:t>
+              <a:t>Oussama Ennadafy</a:t>
             </a:r>
           </a:p>
           <a:p>
@@ -6731,7 +6731,7 @@
                 </a:solidFill>
                 <a:latin typeface="Calibri"/>
               </a:rPr>
-              <a:t>Abdallah ATGUIRI  ·  G-Lab  ·  Juillet 2026</a:t>
+              <a:t>Oussama Ennadafy  ·  G-Lab  ·  Juillet 2026</a:t>
             </a:r>
           </a:p>
         </p:txBody>
@@ -7893,7 +7893,7 @@
                 </a:solidFill>
                 <a:latin typeface="Calibri"/>
               </a:rPr>
-              <a:t>Abdallah ATGUIRI  ·  G-Lab  ·  Juillet 2026</a:t>
+              <a:t>Oussama Ennadafy  ·  G-Lab  ·  Juillet 2026</a:t>
             </a:r>
           </a:p>
         </p:txBody>
@@ -8262,7 +8262,7 @@
                 </a:solidFill>
                 <a:latin typeface="Calibri"/>
               </a:rPr>
-              <a:t>Abdallah ATGUIRI  ·  G-Lab  ·  Juillet 2026</a:t>
+              <a:t>Oussama Ennadafy  ·  G-Lab  ·  Juillet 2026</a:t>
             </a:r>
           </a:p>
         </p:txBody>
@@ -8631,7 +8631,7 @@
                 </a:solidFill>
                 <a:latin typeface="Calibri"/>
               </a:rPr>
-              <a:t>Abdallah ATGUIRI  ·  G-Lab  ·  Juillet 2026</a:t>
+              <a:t>Oussama Ennadafy  ·  G-Lab  ·  Juillet 2026</a:t>
             </a:r>
           </a:p>
         </p:txBody>
@@ -9558,7 +9558,7 @@
                 </a:solidFill>
                 <a:latin typeface="Calibri"/>
               </a:rPr>
-              <a:t>Abdallah ATGUIRI  ·  G-Lab  ·  Juillet 2026</a:t>
+              <a:t>Oussama Ennadafy  ·  G-Lab  ·  Juillet 2026</a:t>
             </a:r>
           </a:p>
         </p:txBody>
@@ -10483,7 +10483,7 @@
                 </a:solidFill>
                 <a:latin typeface="Calibri"/>
               </a:rPr>
-              <a:t>Abdallah ATGUIRI  ·  G-Lab  ·  Juillet 2026</a:t>
+              <a:t>Oussama Ennadafy  ·  G-Lab  ·  Juillet 2026</a:t>
             </a:r>
           </a:p>
         </p:txBody>
@@ -11555,7 +11555,7 @@
                 </a:solidFill>
                 <a:latin typeface="Calibri"/>
               </a:rPr>
-              <a:t>Abdallah ATGUIRI  ·  G-Lab  ·  Juillet 2026</a:t>
+              <a:t>Oussama Ennadafy  ·  G-Lab  ·  Juillet 2026</a:t>
             </a:r>
           </a:p>
         </p:txBody>
@@ -12713,7 +12713,7 @@
                 </a:solidFill>
                 <a:latin typeface="Calibri"/>
               </a:rPr>
-              <a:t>Abdallah ATGUIRI  ·  G-Lab  ·  Juillet 2026</a:t>
+              <a:t>Oussama Ennadafy  ·  G-Lab  ·  Juillet 2026</a:t>
             </a:r>
           </a:p>
         </p:txBody>
